--- a/docs/ALFA_University_College_Management_Plan_v4.pptx
+++ b/docs/ALFA_University_College_Management_Plan_v4.pptx
@@ -5570,22 +5570,7 @@
               <a:buChar char="•"/>
             </a:pPr>
             <a:r>
-              <a:rPr sz="1700" b="1">
-                <a:solidFill>
-                  <a:srgbClr val="1E293B"/>
-                </a:solidFill>
-                <a:latin typeface="Liberation Sans"/>
-              </a:rPr>
-              <a:t>Control Types: </a:t>
-            </a:r>
-            <a:r>
-              <a:rPr sz="1550">
-                <a:solidFill>
-                  <a:srgbClr val="475569"/>
-                </a:solidFill>
-                <a:latin typeface="Liberation Sans"/>
-              </a:rPr>
-              <a:t>Feedforward (M3 test), Concurrent (alerts), Feedback.</a:t>
+              <a:t>Control Types: Feedforward, Concurrent, Feedback (Traffic-Light: Green ≥100%, Amber 90–99%, Red &lt;90%).</a:t>
             </a:r>
           </a:p>
           <a:p>
